--- a/docs/UseReady_SolrCloud_RCA_Case_Study_Updated.pptx
+++ b/docs/UseReady_SolrCloud_RCA_Case_Study_Updated.pptx
@@ -13900,8 +13900,8 @@
         </p:nvSpPr>
         <p:spPr>
           <a:xfrm>
-            <a:off x="758952" y="2706624"/>
-            <a:ext cx="2221992" cy="475488"/>
+            <a:off x="758952" y="2828823"/>
+            <a:ext cx="2221992" cy="231089"/>
           </a:xfrm>
           <a:prstGeom prst="rect">
             <a:avLst/>
@@ -13926,14 +13926,29 @@
               </a:spcAft>
             </a:pPr>
             <a:r>
-              <a:rPr sz="1230" b="1">
-                <a:solidFill>
-                  <a:srgbClr val="142644"/>
+              <a:rPr sz="1230" b="1" dirty="0">
+                <a:solidFill>
+                  <a:srgbClr val="FF0000"/>
                 </a:solidFill>
                 <a:latin typeface="Aptos"/>
               </a:rPr>
-              <a:t>Qwen3:8B + Ollama</a:t>
-            </a:r>
+              <a:t>Qwen3:8B + </a:t>
+            </a:r>
+            <a:r>
+              <a:rPr sz="1230" b="1" dirty="0" err="1">
+                <a:solidFill>
+                  <a:srgbClr val="FF0000"/>
+                </a:solidFill>
+                <a:latin typeface="Aptos"/>
+              </a:rPr>
+              <a:t>Ollama</a:t>
+            </a:r>
+            <a:endParaRPr sz="1230" b="1" dirty="0">
+              <a:solidFill>
+                <a:srgbClr val="FF0000"/>
+              </a:solidFill>
+              <a:latin typeface="Aptos"/>
+            </a:endParaRPr>
           </a:p>
         </p:txBody>
       </p:sp>
@@ -14348,8 +14363,8 @@
         </p:nvSpPr>
         <p:spPr>
           <a:xfrm>
-            <a:off x="758952" y="3986784"/>
-            <a:ext cx="2221992" cy="475488"/>
+            <a:off x="758952" y="4108983"/>
+            <a:ext cx="2221992" cy="231089"/>
           </a:xfrm>
           <a:prstGeom prst="rect">
             <a:avLst/>
@@ -14374,9 +14389,9 @@
               </a:spcAft>
             </a:pPr>
             <a:r>
-              <a:rPr sz="1230" b="1">
-                <a:solidFill>
-                  <a:srgbClr val="142644"/>
+              <a:rPr sz="1230" b="1" dirty="0">
+                <a:solidFill>
+                  <a:srgbClr val="00B050"/>
                 </a:solidFill>
                 <a:latin typeface="Aptos"/>
               </a:rPr>
@@ -14598,7 +14613,7 @@
               </a:spcAft>
             </a:pPr>
             <a:r>
-              <a:rPr sz="1230" b="1">
+              <a:rPr sz="1230" b="1" dirty="0">
                 <a:solidFill>
                   <a:srgbClr val="142644"/>
                 </a:solidFill>

--- a/docs/UseReady_SolrCloud_RCA_Case_Study_Updated.pptx
+++ b/docs/UseReady_SolrCloud_RCA_Case_Study_Updated.pptx
@@ -13900,7 +13900,7 @@
         </p:nvSpPr>
         <p:spPr>
           <a:xfrm>
-            <a:off x="758952" y="2828823"/>
+            <a:off x="749808" y="2828823"/>
             <a:ext cx="2221992" cy="231089"/>
           </a:xfrm>
           <a:prstGeom prst="rect">
@@ -13927,26 +13927,17 @@
             </a:pPr>
             <a:r>
               <a:rPr sz="1230" b="1" dirty="0">
-                <a:solidFill>
-                  <a:srgbClr val="FF0000"/>
-                </a:solidFill>
                 <a:latin typeface="Aptos"/>
               </a:rPr>
               <a:t>Qwen3:8B + </a:t>
             </a:r>
             <a:r>
               <a:rPr sz="1230" b="1" dirty="0" err="1">
-                <a:solidFill>
-                  <a:srgbClr val="FF0000"/>
-                </a:solidFill>
                 <a:latin typeface="Aptos"/>
               </a:rPr>
               <a:t>Ollama</a:t>
             </a:r>
             <a:endParaRPr sz="1230" b="1" dirty="0">
-              <a:solidFill>
-                <a:srgbClr val="FF0000"/>
-              </a:solidFill>
               <a:latin typeface="Aptos"/>
             </a:endParaRPr>
           </a:p>
@@ -13986,7 +13977,7 @@
               </a:spcAft>
             </a:pPr>
             <a:r>
-              <a:rPr sz="1140" b="0">
+              <a:rPr sz="1140" b="0" dirty="0">
                 <a:solidFill>
                   <a:srgbClr val="61718A"/>
                 </a:solidFill>
@@ -14408,8 +14399,8 @@
         </p:nvSpPr>
         <p:spPr>
           <a:xfrm>
-            <a:off x="3227832" y="3986784"/>
-            <a:ext cx="1709928" cy="475488"/>
+            <a:off x="3227832" y="4116101"/>
+            <a:ext cx="1709928" cy="216854"/>
           </a:xfrm>
           <a:prstGeom prst="rect">
             <a:avLst/>
@@ -14434,13 +14425,22 @@
               </a:spcAft>
             </a:pPr>
             <a:r>
-              <a:rPr sz="1140" b="0">
-                <a:solidFill>
-                  <a:srgbClr val="61718A"/>
+              <a:rPr sz="1140" b="0" dirty="0" err="1">
+                <a:solidFill>
+                  <a:srgbClr val="00B050"/>
                 </a:solidFill>
                 <a:latin typeface="Aptos"/>
               </a:rPr>
-              <a:t>Groq hosted API</a:t>
+              <a:t>Groq</a:t>
+            </a:r>
+            <a:r>
+              <a:rPr sz="1140" b="0" dirty="0">
+                <a:solidFill>
+                  <a:srgbClr val="00B050"/>
+                </a:solidFill>
+                <a:latin typeface="Aptos"/>
+              </a:rPr>
+              <a:t> hosted API</a:t>
             </a:r>
           </a:p>
         </p:txBody>
@@ -14453,8 +14453,8 @@
         </p:nvSpPr>
         <p:spPr>
           <a:xfrm>
-            <a:off x="5166359" y="3986784"/>
-            <a:ext cx="2112264" cy="475488"/>
+            <a:off x="5166359" y="4108983"/>
+            <a:ext cx="2112264" cy="231089"/>
           </a:xfrm>
           <a:prstGeom prst="rect">
             <a:avLst/>
@@ -14479,9 +14479,9 @@
               </a:spcAft>
             </a:pPr>
             <a:r>
-              <a:rPr sz="1230" b="1">
-                <a:solidFill>
-                  <a:srgbClr val="142644"/>
+              <a:rPr sz="1230" b="1" dirty="0">
+                <a:solidFill>
+                  <a:srgbClr val="00B050"/>
                 </a:solidFill>
                 <a:latin typeface="Aptos"/>
               </a:rPr>
@@ -14498,8 +14498,8 @@
         </p:nvSpPr>
         <p:spPr>
           <a:xfrm>
-            <a:off x="7543800" y="3986784"/>
-            <a:ext cx="4014215" cy="475488"/>
+            <a:off x="7543800" y="4023126"/>
+            <a:ext cx="4014215" cy="402803"/>
           </a:xfrm>
           <a:prstGeom prst="rect">
             <a:avLst/>
@@ -14524,9 +14524,9 @@
               </a:spcAft>
             </a:pPr>
             <a:r>
-              <a:rPr sz="1140" b="0">
-                <a:solidFill>
-                  <a:srgbClr val="61718A"/>
+              <a:rPr sz="1140" b="0" dirty="0">
+                <a:solidFill>
+                  <a:srgbClr val="00B050"/>
                 </a:solidFill>
                 <a:latin typeface="Aptos"/>
               </a:rPr>
@@ -14859,7 +14859,7 @@
         <p:spPr>
           <a:xfrm>
             <a:off x="923544" y="5705856"/>
-            <a:ext cx="10405872" cy="274320"/>
+            <a:ext cx="10405872" cy="221599"/>
           </a:xfrm>
           <a:prstGeom prst="rect">
             <a:avLst/>
@@ -14884,13 +14884,40 @@
               </a:spcAft>
             </a:pPr>
             <a:r>
-              <a:rPr sz="1170" b="1">
+              <a:rPr sz="1170" b="1" dirty="0">
                 <a:solidFill>
                   <a:srgbClr val="385DD7"/>
                 </a:solidFill>
                 <a:latin typeface="Aptos"/>
               </a:rPr>
-              <a:t>Qwen hosted ≈ $0.00092   •   Groq ≈ $0.0030   •   GPT-5 mini ≈ $0.0070   •   Local = compute/electricity</a:t>
+              <a:t>Qwen hosted ≈ $0.00092   •   </a:t>
+            </a:r>
+            <a:r>
+              <a:rPr sz="1170" b="1" dirty="0" err="1">
+                <a:solidFill>
+                  <a:srgbClr val="00B050"/>
+                </a:solidFill>
+                <a:latin typeface="Aptos"/>
+              </a:rPr>
+              <a:t>Groq</a:t>
+            </a:r>
+            <a:r>
+              <a:rPr sz="1170" b="1" dirty="0">
+                <a:solidFill>
+                  <a:srgbClr val="00B050"/>
+                </a:solidFill>
+                <a:latin typeface="Aptos"/>
+              </a:rPr>
+              <a:t> ≈ $0.0030</a:t>
+            </a:r>
+            <a:r>
+              <a:rPr sz="1170" b="1" dirty="0">
+                <a:solidFill>
+                  <a:srgbClr val="385DD7"/>
+                </a:solidFill>
+                <a:latin typeface="Aptos"/>
+              </a:rPr>
+              <a:t>   •   GPT-5 mini ≈ $0.0070   •   Local = compute/electricity</a:t>
             </a:r>
           </a:p>
         </p:txBody>
